--- a/first_aid_tema1_numbered/6_Основные_правила_вызова_скорой_медицинской_помощи.pptx
+++ b/first_aid_tema1_numbered/6_Основные_правила_вызова_скорой_медицинской_помощи.pptx
@@ -65052,558 +65052,6 @@
       <p:grpSpPr/>
       <p:sp>
         <p:nvSpPr>
-          <p:cNvPr id="2" name="Rectangle 1"/>
-          <p:cNvSpPr/>
-          <p:nvPr/>
-        </p:nvSpPr>
-        <p:spPr>
-          <a:xfrm>
-            <a:off x="0" y="0"/>
-            <a:ext cx="24384000" cy="13716000"/>
-          </a:xfrm>
-          <a:prstGeom prst="rect">
-            <a:avLst/>
-          </a:prstGeom>
-          <a:solidFill>
-            <a:srgbClr val="FFFFFF"/>
-          </a:solidFill>
-          <a:ln>
-            <a:noFill/>
-          </a:ln>
-        </p:spPr>
-        <p:style>
-          <a:lnRef idx="1">
-            <a:schemeClr val="accent1"/>
-          </a:lnRef>
-          <a:fillRef idx="3">
-            <a:schemeClr val="accent1"/>
-          </a:fillRef>
-          <a:effectRef idx="2">
-            <a:schemeClr val="accent1"/>
-          </a:effectRef>
-          <a:fontRef idx="minor">
-            <a:schemeClr val="lt1"/>
-          </a:fontRef>
-        </p:style>
-        <p:txBody>
-          <a:bodyPr rtlCol="0" anchor="ctr"/>
-          <a:lstStyle/>
-          <a:p>
-            <a:pPr algn="ctr"/>
-          </a:p>
-        </p:txBody>
-      </p:sp>
-      <p:sp>
-        <p:nvSpPr>
-          <p:cNvPr id="3" name="Rectangle 2"/>
-          <p:cNvSpPr/>
-          <p:nvPr/>
-        </p:nvSpPr>
-        <p:spPr>
-          <a:xfrm>
-            <a:off x="0" y="0"/>
-            <a:ext cx="180000" cy="13716000"/>
-          </a:xfrm>
-          <a:prstGeom prst="rect">
-            <a:avLst/>
-          </a:prstGeom>
-          <a:solidFill>
-            <a:srgbClr val="E30613"/>
-          </a:solidFill>
-          <a:ln>
-            <a:noFill/>
-          </a:ln>
-        </p:spPr>
-        <p:style>
-          <a:lnRef idx="1">
-            <a:schemeClr val="accent1"/>
-          </a:lnRef>
-          <a:fillRef idx="3">
-            <a:schemeClr val="accent1"/>
-          </a:fillRef>
-          <a:effectRef idx="2">
-            <a:schemeClr val="accent1"/>
-          </a:effectRef>
-          <a:fontRef idx="minor">
-            <a:schemeClr val="lt1"/>
-          </a:fontRef>
-        </p:style>
-        <p:txBody>
-          <a:bodyPr rtlCol="0" anchor="ctr"/>
-          <a:lstStyle/>
-          <a:p>
-            <a:pPr algn="ctr"/>
-          </a:p>
-        </p:txBody>
-      </p:sp>
-      <p:sp>
-        <p:nvSpPr>
-          <p:cNvPr id="4" name="TextBox 3"/>
-          <p:cNvSpPr txBox="1"/>
-          <p:nvPr/>
-        </p:nvSpPr>
-        <p:spPr>
-          <a:xfrm>
-            <a:off x="220000" y="6540000"/>
-            <a:ext cx="900000" cy="600000"/>
-          </a:xfrm>
-          <a:prstGeom prst="rect">
-            <a:avLst/>
-          </a:prstGeom>
-          <a:noFill/>
-        </p:spPr>
-        <p:txBody>
-          <a:bodyPr wrap="square">
-            <a:spAutoFit/>
-          </a:bodyPr>
-          <a:lstStyle/>
-          <a:p>
-            <a:pPr algn="l"/>
-            <a:r>
-              <a:rPr sz="2200" b="1">
-                <a:solidFill>
-                  <a:srgbClr val="6B7280"/>
-                </a:solidFill>
-                <a:latin typeface="Arial"/>
-              </a:rPr>
-              <a:t>2</a:t>
-            </a:r>
-          </a:p>
-        </p:txBody>
-      </p:sp>
-      <p:sp>
-        <p:nvSpPr>
-          <p:cNvPr id="5" name="TextBox 4"/>
-          <p:cNvSpPr txBox="1"/>
-          <p:nvPr/>
-        </p:nvSpPr>
-        <p:spPr>
-          <a:xfrm>
-            <a:off x="2050000" y="1400000"/>
-            <a:ext cx="21000000" cy="1000000"/>
-          </a:xfrm>
-          <a:prstGeom prst="rect">
-            <a:avLst/>
-          </a:prstGeom>
-          <a:noFill/>
-        </p:spPr>
-        <p:txBody>
-          <a:bodyPr wrap="square">
-            <a:spAutoFit/>
-          </a:bodyPr>
-          <a:lstStyle/>
-          <a:p>
-            <a:pPr algn="l"/>
-            <a:r>
-              <a:rPr sz="2600" b="1">
-                <a:solidFill>
-                  <a:srgbClr val="1A1A1A"/>
-                </a:solidFill>
-                <a:latin typeface="Arial"/>
-              </a:rPr>
-              <a:t>НОМЕР 112 И ПОВОДЫ К ВЫЗОВУ СМП</a:t>
-            </a:r>
-          </a:p>
-        </p:txBody>
-      </p:sp>
-      <p:sp>
-        <p:nvSpPr>
-          <p:cNvPr id="6" name="Rectangle 5"/>
-          <p:cNvSpPr/>
-          <p:nvPr/>
-        </p:nvSpPr>
-        <p:spPr>
-          <a:xfrm>
-            <a:off x="2060000" y="2500000"/>
-            <a:ext cx="12000000" cy="70000"/>
-          </a:xfrm>
-          <a:prstGeom prst="rect">
-            <a:avLst/>
-          </a:prstGeom>
-          <a:solidFill>
-            <a:srgbClr val="E30613"/>
-          </a:solidFill>
-          <a:ln>
-            <a:noFill/>
-          </a:ln>
-        </p:spPr>
-        <p:style>
-          <a:lnRef idx="1">
-            <a:schemeClr val="accent1"/>
-          </a:lnRef>
-          <a:fillRef idx="3">
-            <a:schemeClr val="accent1"/>
-          </a:fillRef>
-          <a:effectRef idx="2">
-            <a:schemeClr val="accent1"/>
-          </a:effectRef>
-          <a:fontRef idx="minor">
-            <a:schemeClr val="lt1"/>
-          </a:fontRef>
-        </p:style>
-        <p:txBody>
-          <a:bodyPr rtlCol="0" anchor="ctr"/>
-          <a:lstStyle/>
-          <a:p>
-            <a:pPr algn="ctr"/>
-          </a:p>
-        </p:txBody>
-      </p:sp>
-      <p:sp>
-        <p:nvSpPr>
-          <p:cNvPr id="7" name="TextBox 6"/>
-          <p:cNvSpPr txBox="1"/>
-          <p:nvPr/>
-        </p:nvSpPr>
-        <p:spPr>
-          <a:xfrm>
-            <a:off x="2050000" y="2650000"/>
-            <a:ext cx="18000000" cy="500000"/>
-          </a:xfrm>
-          <a:prstGeom prst="rect">
-            <a:avLst/>
-          </a:prstGeom>
-          <a:noFill/>
-        </p:spPr>
-        <p:txBody>
-          <a:bodyPr wrap="square">
-            <a:spAutoFit/>
-          </a:bodyPr>
-          <a:lstStyle/>
-          <a:p>
-            <a:pPr algn="l"/>
-            <a:r>
-              <a:rPr sz="1400" b="0">
-                <a:solidFill>
-                  <a:srgbClr val="6B7280"/>
-                </a:solidFill>
-                <a:latin typeface="Arial"/>
-              </a:rPr>
-              <a:t>Тема 1 · п. 6  Вызов СМП и специальных служб</a:t>
-            </a:r>
-          </a:p>
-        </p:txBody>
-      </p:sp>
-      <p:sp>
-        <p:nvSpPr>
-          <p:cNvPr id="8" name="Rounded Rectangle 7"/>
-          <p:cNvSpPr/>
-          <p:nvPr/>
-        </p:nvSpPr>
-        <p:spPr>
-          <a:xfrm>
-            <a:off x="2050000" y="3400000"/>
-            <a:ext cx="20000000" cy="8800000"/>
-          </a:xfrm>
-          <a:prstGeom prst="roundRect">
-            <a:avLst/>
-          </a:prstGeom>
-          <a:solidFill>
-            <a:srgbClr val="F7F7F8"/>
-          </a:solidFill>
-          <a:ln>
-            <a:noFill/>
-          </a:ln>
-        </p:spPr>
-        <p:style>
-          <a:lnRef idx="1">
-            <a:schemeClr val="accent1"/>
-          </a:lnRef>
-          <a:fillRef idx="3">
-            <a:schemeClr val="accent1"/>
-          </a:fillRef>
-          <a:effectRef idx="2">
-            <a:schemeClr val="accent1"/>
-          </a:effectRef>
-          <a:fontRef idx="minor">
-            <a:schemeClr val="lt1"/>
-          </a:fontRef>
-        </p:style>
-        <p:txBody>
-          <a:bodyPr rtlCol="0" anchor="ctr"/>
-          <a:lstStyle/>
-          <a:p>
-            <a:pPr algn="ctr"/>
-          </a:p>
-        </p:txBody>
-      </p:sp>
-      <p:sp>
-        <p:nvSpPr>
-          <p:cNvPr id="9" name="TextBox 8"/>
-          <p:cNvSpPr txBox="1"/>
-          <p:nvPr/>
-        </p:nvSpPr>
-        <p:spPr>
-          <a:xfrm>
-            <a:off x="2400000" y="3700000"/>
-            <a:ext cx="19000000" cy="8000000"/>
-          </a:xfrm>
-          <a:prstGeom prst="rect">
-            <a:avLst/>
-          </a:prstGeom>
-          <a:noFill/>
-        </p:spPr>
-        <p:txBody>
-          <a:bodyPr wrap="square">
-            <a:spAutoFit/>
-          </a:bodyPr>
-          <a:lstStyle/>
-          <a:p>
-            <a:pPr>
-              <a:spcAft>
-                <a:spcPts val="600"/>
-              </a:spcAft>
-            </a:pPr>
-            <a:r>
-              <a:rPr sz="1600" b="0">
-                <a:solidFill>
-                  <a:srgbClr val="1A1A1A"/>
-                </a:solidFill>
-                <a:latin typeface="Arial"/>
-              </a:rPr>
-              <a:t>Единый номер экстренных служб — 112 (также 101, 102, 103 и региональные номера).</a:t>
-            </a:r>
-          </a:p>
-          <a:p>
-            <a:pPr>
-              <a:spcAft>
-                <a:spcPts val="600"/>
-              </a:spcAft>
-            </a:pPr>
-            <a:r>
-              <a:rPr sz="1600" b="0">
-                <a:solidFill>
-                  <a:srgbClr val="1A1A1A"/>
-                </a:solidFill>
-                <a:latin typeface="Arial"/>
-              </a:rPr>
-              <a:t/>
-            </a:r>
-          </a:p>
-          <a:p>
-            <a:pPr>
-              <a:spcAft>
-                <a:spcPts val="600"/>
-              </a:spcAft>
-            </a:pPr>
-            <a:r>
-              <a:rPr sz="1600" b="0">
-                <a:solidFill>
-                  <a:srgbClr val="1A1A1A"/>
-                </a:solidFill>
-                <a:latin typeface="Arial"/>
-              </a:rPr>
-              <a:t>Поводы к вызову скорой медицинской помощи (в т.ч. не все входят в перечень</a:t>
-            </a:r>
-          </a:p>
-          <a:p>
-            <a:pPr>
-              <a:spcAft>
-                <a:spcPts val="600"/>
-              </a:spcAft>
-            </a:pPr>
-            <a:r>
-              <a:rPr sz="1600" b="0">
-                <a:solidFill>
-                  <a:srgbClr val="1A1A1A"/>
-                </a:solidFill>
-                <a:latin typeface="Arial"/>
-              </a:rPr>
-              <a:t>состояний первой помощи, но требуют вызова СМП): нарушения сознания, дыхания,</a:t>
-            </a:r>
-          </a:p>
-          <a:p>
-            <a:pPr>
-              <a:spcAft>
-                <a:spcPts val="600"/>
-              </a:spcAft>
-            </a:pPr>
-            <a:r>
-              <a:rPr sz="1600" b="0">
-                <a:solidFill>
-                  <a:srgbClr val="1A1A1A"/>
-                </a:solidFill>
-                <a:latin typeface="Arial"/>
-              </a:rPr>
-              <a:t>кровообращения; психические расстройства с опасностью для себя/окружающих;</a:t>
-            </a:r>
-          </a:p>
-          <a:p>
-            <a:pPr>
-              <a:spcAft>
-                <a:spcPts val="600"/>
-              </a:spcAft>
-            </a:pPr>
-            <a:r>
-              <a:rPr sz="1600" b="0">
-                <a:solidFill>
-                  <a:srgbClr val="1A1A1A"/>
-                </a:solidFill>
-                <a:latin typeface="Arial"/>
-              </a:rPr>
-              <a:t>болевой синдром; травмы/отравления/ранения; термические и химические ожоги;</a:t>
-            </a:r>
-          </a:p>
-          <a:p>
-            <a:pPr>
-              <a:spcAft>
-                <a:spcPts val="600"/>
-              </a:spcAft>
-            </a:pPr>
-            <a:r>
-              <a:rPr sz="1600" b="0">
-                <a:solidFill>
-                  <a:srgbClr val="1A1A1A"/>
-                </a:solidFill>
-                <a:latin typeface="Arial"/>
-              </a:rPr>
-              <a:t>кровотечения; роды, угроза прерывания беременности.</a:t>
-            </a:r>
-          </a:p>
-          <a:p>
-            <a:pPr>
-              <a:spcAft>
-                <a:spcPts val="600"/>
-              </a:spcAft>
-            </a:pPr>
-            <a:r>
-              <a:rPr sz="1600" b="0">
-                <a:solidFill>
-                  <a:srgbClr val="1A1A1A"/>
-                </a:solidFill>
-                <a:latin typeface="Arial"/>
-              </a:rPr>
-              <a:t/>
-            </a:r>
-          </a:p>
-          <a:p>
-            <a:pPr>
-              <a:spcAft>
-                <a:spcPts val="600"/>
-              </a:spcAft>
-            </a:pPr>
-            <a:r>
-              <a:rPr sz="1600" b="0">
-                <a:solidFill>
-                  <a:srgbClr val="1A1A1A"/>
-                </a:solidFill>
-                <a:latin typeface="Arial"/>
-              </a:rPr>
-              <a:t>Сообщить диспетчеру: место и суть происшествия; число пострадавших, повреждения,</a:t>
-            </a:r>
-          </a:p>
-          <a:p>
-            <a:pPr>
-              <a:spcAft>
-                <a:spcPts val="600"/>
-              </a:spcAft>
-            </a:pPr>
-            <a:r>
-              <a:rPr sz="1600" b="0">
-                <a:solidFill>
-                  <a:srgbClr val="1A1A1A"/>
-                </a:solidFill>
-                <a:latin typeface="Arial"/>
-              </a:rPr>
-              <a:t>тяжесть; какая помощь оказывается.</a:t>
-            </a:r>
-          </a:p>
-          <a:p>
-            <a:pPr>
-              <a:spcAft>
-                <a:spcPts val="600"/>
-              </a:spcAft>
-            </a:pPr>
-            <a:r>
-              <a:rPr sz="1600" b="0">
-                <a:solidFill>
-                  <a:srgbClr val="1A1A1A"/>
-                </a:solidFill>
-                <a:latin typeface="Arial"/>
-              </a:rPr>
-              <a:t>Трубку отключать после сообщения диспетчера о том, что вызов принят.</a:t>
-            </a:r>
-          </a:p>
-          <a:p>
-            <a:pPr>
-              <a:spcAft>
-                <a:spcPts val="600"/>
-              </a:spcAft>
-            </a:pPr>
-            <a:r>
-              <a:rPr sz="1600" b="0">
-                <a:solidFill>
-                  <a:srgbClr val="1A1A1A"/>
-                </a:solidFill>
-                <a:latin typeface="Arial"/>
-              </a:rPr>
-              <a:t>Диспетчер/сотрудник СМП может дать команды по оказанию первой помощи.</a:t>
-            </a:r>
-          </a:p>
-        </p:txBody>
-      </p:sp>
-      <p:sp>
-        <p:nvSpPr>
-          <p:cNvPr id="10" name="TextBox 9"/>
-          <p:cNvSpPr txBox="1"/>
-          <p:nvPr/>
-        </p:nvSpPr>
-        <p:spPr>
-          <a:xfrm>
-            <a:off x="2050000" y="12400000"/>
-            <a:ext cx="20000000" cy="600000"/>
-          </a:xfrm>
-          <a:prstGeom prst="rect">
-            <a:avLst/>
-          </a:prstGeom>
-          <a:noFill/>
-        </p:spPr>
-        <p:txBody>
-          <a:bodyPr wrap="square">
-            <a:spAutoFit/>
-          </a:bodyPr>
-          <a:lstStyle/>
-          <a:p>
-            <a:pPr algn="l"/>
-            <a:r>
-              <a:rPr sz="1100" b="0">
-                <a:solidFill>
-                  <a:srgbClr val="6B7280"/>
-                </a:solidFill>
-                <a:latin typeface="Arial"/>
-              </a:rPr>
-              <a:t>Дополнено по пособию Минздрава 2025.</a:t>
-            </a:r>
-          </a:p>
-        </p:txBody>
-      </p:sp>
-    </p:spTree>
-  </p:cSld>
-  <p:clrMapOvr>
-    <a:masterClrMapping/>
-  </p:clrMapOvr>
-</p:sld>
-</file>
-
-<file path=ppt/slides/slide3.xml><?xml version="1.0" encoding="utf-8"?>
-<p:sld xmlns:a="http://schemas.openxmlformats.org/drawingml/2006/main" xmlns:r="http://schemas.openxmlformats.org/officeDocument/2006/relationships" xmlns:p="http://schemas.openxmlformats.org/presentationml/2006/main" showMasterPhAnim="0">
-  <p:cSld>
-    <p:spTree>
-      <p:nvGrpSpPr>
-        <p:cNvPr id="1" name=""/>
-        <p:cNvGrpSpPr/>
-        <p:nvPr/>
-      </p:nvGrpSpPr>
-      <p:grpSpPr bwMode="auto">
-        <a:xfrm>
-          <a:off x="0" y="0"/>
-          <a:ext cx="0" cy="0"/>
-          <a:chOff x="0" y="0"/>
-          <a:chExt cx="0" cy="0"/>
-        </a:xfrm>
-      </p:grpSpPr>
-      <p:sp>
-        <p:nvSpPr>
           <p:cNvPr id="866" name="Номер слайда"/>
           <p:cNvSpPr txBox="1">
             <a:spLocks noGrp="1"/>
@@ -65713,7 +65161,10 @@
               <a:t/>
             </a:fld>
             <a:r>
-              <a:t>3</a:t>
+              <a:rPr>
+                <a:solidFill/>
+              </a:rPr>
+              <a:t>2</a:t>
             </a:r>
             <a:endParaRPr kumimoji="0" sz="3500" b="0" i="0" u="none" strike="noStrike" kern="0" cap="none" spc="0" normalizeH="0" baseline="0" noProof="0">
               <a:ln>
@@ -65775,7 +65226,7 @@
               <a:defRPr/>
             </a:pPr>
             <a:r>
-              <a:rPr lang="ru-RU" sz="4600" dirty="0">
+              <a:rPr lang="ru-RU" sz="4600" dirty="0" b="0">
                 <a:solidFill>
                   <a:srgbClr val="404040"/>
                 </a:solidFill>
@@ -65784,7 +65235,7 @@
                 <a:cs typeface="PFDinDisplayPro-Regular"/>
                 <a:sym typeface="Stem"/>
               </a:rPr>
-              <a:t>ПРАВИЛА ВЫЗОВА СКОРОЙ МЕДИЦИНСКОЙ ПОМОЩ</a:t>
+              <a:t>НОМЕР 112 И ПОВОДЫ К ВЫЗОВУ СМП</a:t>
             </a:r>
           </a:p>
         </p:txBody>
@@ -66159,6 +65610,703 @@
           </a:p>
         </p:txBody>
       </p:sp>
+      <p:sp>
+        <p:nvSpPr>
+          <p:cNvPr id="17" name="Прямоугольник 16"/>
+          <p:cNvSpPr/>
+          <p:nvPr/>
+        </p:nvSpPr>
+        <p:spPr bwMode="auto">
+          <a:xfrm>
+            <a:off x="2061252" y="3600000"/>
+            <a:ext cx="20000000" cy="9000000"/>
+          </a:xfrm>
+          <a:prstGeom prst="rect">
+            <a:avLst/>
+          </a:prstGeom>
+        </p:spPr>
+        <p:txBody>
+          <a:bodyPr wrap="square">
+            <a:spAutoFit/>
+          </a:bodyPr>
+          <a:lstStyle/>
+          <a:p>
+            <a:pPr>
+              <a:defRPr/>
+            </a:pPr>
+            <a:r>
+              <a:rPr lang="ru-RU" sz="2800">
+                <a:solidFill>
+                  <a:srgbClr val="404040"/>
+                </a:solidFill>
+                <a:latin typeface="Open Sans"/>
+              </a:rPr>
+              <a:t>Единый номер экстренных служб — 112 (также 101, 102, 103 и региональные номера).</a:t>
+            </a:r>
+            <a:endParaRPr/>
+          </a:p>
+          <a:p>
+            <a:pPr>
+              <a:defRPr/>
+            </a:pPr>
+            <a:r>
+              <a:rPr lang="ru-RU" sz="2800">
+                <a:solidFill>
+                  <a:srgbClr val="404040"/>
+                </a:solidFill>
+                <a:latin typeface="Open Sans"/>
+              </a:rPr>
+              <a:t> </a:t>
+            </a:r>
+            <a:endParaRPr/>
+          </a:p>
+          <a:p>
+            <a:pPr>
+              <a:defRPr/>
+            </a:pPr>
+            <a:r>
+              <a:rPr lang="ru-RU" sz="2800">
+                <a:solidFill>
+                  <a:srgbClr val="404040"/>
+                </a:solidFill>
+                <a:latin typeface="Open Sans"/>
+              </a:rPr>
+              <a:t>Поводы к вызову скорой медицинской помощи (не все входят в перечень состояний первой помощи, но требуют вызова СМП): нарушения сознания, дыхания, кровообращения; психические расстройства с опасностью для себя/окружающих; болевой синдром; травмы, отравления, ранения; термические и химические ожоги; кровотечения; роды, угроза прерывания беременности.</a:t>
+            </a:r>
+            <a:endParaRPr/>
+          </a:p>
+          <a:p>
+            <a:pPr>
+              <a:defRPr/>
+            </a:pPr>
+            <a:r>
+              <a:rPr lang="ru-RU" sz="2800">
+                <a:solidFill>
+                  <a:srgbClr val="404040"/>
+                </a:solidFill>
+                <a:latin typeface="Open Sans"/>
+              </a:rPr>
+              <a:t> </a:t>
+            </a:r>
+            <a:endParaRPr/>
+          </a:p>
+          <a:p>
+            <a:pPr>
+              <a:defRPr/>
+            </a:pPr>
+            <a:r>
+              <a:rPr lang="ru-RU" sz="2800">
+                <a:solidFill>
+                  <a:srgbClr val="404040"/>
+                </a:solidFill>
+                <a:latin typeface="Open Sans"/>
+              </a:rPr>
+              <a:t>Сообщить диспетчеру: место и суть происшествия; число пострадавших, повреждения, тяжесть; какая помощь оказывается.</a:t>
+            </a:r>
+            <a:endParaRPr/>
+          </a:p>
+          <a:p>
+            <a:pPr>
+              <a:defRPr/>
+            </a:pPr>
+            <a:r>
+              <a:rPr lang="ru-RU" sz="2800">
+                <a:solidFill>
+                  <a:srgbClr val="404040"/>
+                </a:solidFill>
+                <a:latin typeface="Open Sans"/>
+              </a:rPr>
+              <a:t>Трубку отключать после сообщения диспетчера о том, что вызов принят.</a:t>
+            </a:r>
+            <a:endParaRPr/>
+          </a:p>
+        </p:txBody>
+      </p:sp>
+    </p:spTree>
+  </p:cSld>
+  <p:clrMapOvr>
+    <a:masterClrMapping/>
+  </p:clrMapOvr>
+</p:sld>
+</file>
+
+<file path=ppt/slides/slide3.xml><?xml version="1.0" encoding="utf-8"?>
+<p:sld xmlns:a="http://schemas.openxmlformats.org/drawingml/2006/main" xmlns:r="http://schemas.openxmlformats.org/officeDocument/2006/relationships" xmlns:p="http://schemas.openxmlformats.org/presentationml/2006/main" showMasterPhAnim="0">
+  <p:cSld>
+    <p:spTree>
+      <p:nvGrpSpPr>
+        <p:cNvPr id="1" name=""/>
+        <p:cNvGrpSpPr/>
+        <p:nvPr/>
+      </p:nvGrpSpPr>
+      <p:grpSpPr bwMode="auto">
+        <a:xfrm>
+          <a:off x="0" y="0"/>
+          <a:ext cx="0" cy="0"/>
+          <a:chOff x="0" y="0"/>
+          <a:chExt cx="0" cy="0"/>
+        </a:xfrm>
+      </p:grpSpPr>
+      <p:sp>
+        <p:nvSpPr>
+          <p:cNvPr id="866" name="Номер слайда"/>
+          <p:cNvSpPr txBox="1">
+            <a:spLocks noGrp="1"/>
+          </p:cNvSpPr>
+          <p:nvPr>
+            <p:ph type="sldNum" sz="quarter" idx="4294967295"/>
+          </p:nvPr>
+        </p:nvSpPr>
+        <p:spPr bwMode="auto">
+          <a:xfrm>
+            <a:off x="6350" y="6542537"/>
+            <a:ext cx="684000" cy="630942"/>
+          </a:xfrm>
+          <a:prstGeom prst="rect">
+            <a:avLst/>
+          </a:prstGeom>
+          <a:gradFill>
+            <a:gsLst>
+              <a:gs pos="0">
+                <a:srgbClr val="656565"/>
+              </a:gs>
+              <a:gs pos="50000">
+                <a:schemeClr val="accent6"/>
+              </a:gs>
+              <a:gs pos="100000">
+                <a:srgbClr val="444444"/>
+              </a:gs>
+            </a:gsLst>
+            <a:lin ang="5400000" scaled="1"/>
+          </a:gradFill>
+          <a:ln w="6350">
+            <a:solidFill>
+              <a:srgbClr val="DDDDDD"/>
+            </a:solidFill>
+            <a:miter lim="800000"/>
+          </a:ln>
+          <a:effectLst>
+            <a:outerShdw blurRad="63500" dist="19050" dir="5400000" rotWithShape="0">
+              <a:srgbClr val="000000">
+                <a:alpha val="63000"/>
+              </a:srgbClr>
+            </a:outerShdw>
+          </a:effectLst>
+        </p:spPr>
+        <p:txBody>
+          <a:bodyPr wrap="square"/>
+          <a:lstStyle>
+            <a:lvl1pPr>
+              <a:defRPr sz="3500">
+                <a:solidFill>
+                  <a:srgbClr val="FFFFFF"/>
+                </a:solidFill>
+              </a:defRPr>
+            </a:lvl1pPr>
+          </a:lstStyle>
+          <a:p>
+            <a:pPr marL="0" marR="0" lvl="0" indent="0" algn="ctr" defTabSz="1828434" rtl="0" eaLnBrk="1" fontAlgn="auto" latinLnBrk="0" hangingPunct="1">
+              <a:lnSpc>
+                <a:spcPct val="100000"/>
+              </a:lnSpc>
+              <a:spcBef>
+                <a:spcPts val="0"/>
+              </a:spcBef>
+              <a:spcAft>
+                <a:spcPts val="0"/>
+              </a:spcAft>
+              <a:buClrTx/>
+              <a:buSzTx/>
+              <a:buFontTx/>
+              <a:buNone/>
+              <a:tabLst/>
+              <a:defRPr/>
+            </a:pPr>
+            <a:fld id="{86CB4B4D-7CA3-9044-876B-883B54F8677D}" type="slidenum">
+              <a:rPr kumimoji="0" sz="3500" b="0" i="0" u="none" strike="noStrike" kern="0" cap="none" spc="0" normalizeH="0" baseline="0" noProof="0">
+                <a:ln>
+                  <a:noFill/>
+                </a:ln>
+                <a:solidFill>
+                  <a:srgbClr val="FFFFFF"/>
+                </a:solidFill>
+                <a:effectLst/>
+                <a:uLnTx/>
+                <a:uFillTx/>
+                <a:latin typeface="Open Sans Light"/>
+                <a:ea typeface="Open Sans"/>
+                <a:cs typeface="Calibri"/>
+                <a:sym typeface="Open Sans"/>
+              </a:rPr>
+              <a:pPr marL="0" marR="0" lvl="0" indent="0" algn="ctr" defTabSz="1828434" rtl="0" eaLnBrk="1" fontAlgn="auto" latinLnBrk="0" hangingPunct="1">
+                <a:lnSpc>
+                  <a:spcPct val="100000"/>
+                </a:lnSpc>
+                <a:spcBef>
+                  <a:spcPts val="0"/>
+                </a:spcBef>
+                <a:spcAft>
+                  <a:spcPts val="0"/>
+                </a:spcAft>
+                <a:buClrTx/>
+                <a:buSzTx/>
+                <a:buFontTx/>
+                <a:buNone/>
+                <a:tabLst/>
+                <a:defRPr/>
+              </a:pPr>
+              <a:t/>
+            </a:fld>
+            <a:r>
+              <a:rPr>
+                <a:solidFill/>
+              </a:rPr>
+              <a:t>3</a:t>
+            </a:r>
+            <a:endParaRPr kumimoji="0" sz="3500" b="0" i="0" u="none" strike="noStrike" kern="0" cap="none" spc="0" normalizeH="0" baseline="0" noProof="0">
+              <a:ln>
+                <a:noFill/>
+              </a:ln>
+              <a:solidFill>
+                <a:srgbClr val="FFFFFF"/>
+              </a:solidFill>
+              <a:effectLst/>
+              <a:uLnTx/>
+              <a:uFillTx/>
+              <a:latin typeface="Open Sans Light"/>
+              <a:ea typeface="Open Sans"/>
+              <a:cs typeface="Calibri"/>
+              <a:sym typeface="Open Sans"/>
+            </a:endParaRPr>
+          </a:p>
+        </p:txBody>
+      </p:sp>
+      <p:sp>
+        <p:nvSpPr>
+          <p:cNvPr id="29" name="TextBox 6"/>
+          <p:cNvSpPr txBox="1"/>
+          <p:nvPr/>
+        </p:nvSpPr>
+        <p:spPr bwMode="auto">
+          <a:xfrm>
+            <a:off x="2057046" y="1804451"/>
+            <a:ext cx="21204690" cy="800219"/>
+          </a:xfrm>
+          <a:prstGeom prst="rect">
+            <a:avLst/>
+          </a:prstGeom>
+          <a:ln w="12700">
+            <a:miter lim="400000"/>
+          </a:ln>
+        </p:spPr>
+        <p:txBody>
+          <a:bodyPr wrap="square" lIns="45720" rIns="45720">
+            <a:spAutoFit/>
+          </a:bodyPr>
+          <a:lstStyle>
+            <a:lvl1pPr>
+              <a:defRPr sz="6600">
+                <a:solidFill>
+                  <a:srgbClr val="010101"/>
+                </a:solidFill>
+                <a:latin typeface="Montserrat Semi Bold"/>
+                <a:ea typeface="Montserrat Semi Bold"/>
+                <a:cs typeface="Montserrat Semi Bold"/>
+              </a:defRPr>
+            </a:lvl1pPr>
+          </a:lstStyle>
+          <a:p>
+            <a:pPr lvl="0" defTabSz="914400" rtl="0">
+              <a:lnSpc>
+                <a:spcPct val="100000"/>
+              </a:lnSpc>
+              <a:defRPr/>
+            </a:pPr>
+            <a:r>
+              <a:rPr lang="ru-RU" sz="4600" dirty="0">
+                <a:solidFill>
+                  <a:srgbClr val="404040"/>
+                </a:solidFill>
+                <a:latin typeface="PFDinDisplayPro-Regular"/>
+                <a:ea typeface="PFDinDisplayPro-Regular"/>
+                <a:cs typeface="PFDinDisplayPro-Regular"/>
+                <a:sym typeface="Stem"/>
+              </a:rPr>
+              <a:t>ПРАВИЛА ВЫЗОВА СКОРОЙ МЕДИЦИНСКОЙ ПОМОЩ</a:t>
+            </a:r>
+          </a:p>
+        </p:txBody>
+      </p:sp>
+      <p:sp>
+        <p:nvSpPr>
+          <p:cNvPr id="22" name="Rectangle 29"/>
+          <p:cNvSpPr/>
+          <p:nvPr/>
+        </p:nvSpPr>
+        <p:spPr bwMode="auto">
+          <a:xfrm>
+            <a:off x="2061202" y="2604670"/>
+            <a:ext cx="16201906" cy="72000"/>
+          </a:xfrm>
+          <a:prstGeom prst="rect">
+            <a:avLst/>
+          </a:prstGeom>
+          <a:gradFill>
+            <a:gsLst>
+              <a:gs pos="0">
+                <a:srgbClr val="656565"/>
+              </a:gs>
+              <a:gs pos="50000">
+                <a:schemeClr val="accent6"/>
+              </a:gs>
+              <a:gs pos="100000">
+                <a:srgbClr val="444444"/>
+              </a:gs>
+            </a:gsLst>
+            <a:lin ang="5400000" scaled="1"/>
+          </a:gradFill>
+          <a:ln w="6350">
+            <a:solidFill>
+              <a:srgbClr val="DDDDDD"/>
+            </a:solidFill>
+            <a:miter/>
+          </a:ln>
+          <a:effectLst>
+            <a:outerShdw blurRad="63500" dist="19050" dir="5400000" rotWithShape="0">
+              <a:srgbClr val="000000">
+                <a:alpha val="63000"/>
+              </a:srgbClr>
+            </a:outerShdw>
+          </a:effectLst>
+        </p:spPr>
+        <p:txBody>
+          <a:bodyPr lIns="45720" rIns="45720" anchor="ctr"/>
+          <a:lstStyle/>
+          <a:p>
+            <a:pPr marL="0" marR="0" lvl="0" indent="0" algn="l" defTabSz="1828434" rtl="0" eaLnBrk="1" fontAlgn="auto" latinLnBrk="0" hangingPunct="1">
+              <a:lnSpc>
+                <a:spcPct val="100000"/>
+              </a:lnSpc>
+              <a:spcBef>
+                <a:spcPts val="0"/>
+              </a:spcBef>
+              <a:spcAft>
+                <a:spcPts val="0"/>
+              </a:spcAft>
+              <a:buClrTx/>
+              <a:buSzTx/>
+              <a:buFontTx/>
+              <a:buNone/>
+              <a:tabLst/>
+              <a:defRPr>
+                <a:solidFill>
+                  <a:srgbClr val="FFFFFF"/>
+                </a:solidFill>
+              </a:defRPr>
+            </a:pPr>
+            <a:endParaRPr kumimoji="0" sz="3500" b="0" i="0" u="none" strike="noStrike" kern="0" cap="none" spc="0" normalizeH="0" baseline="0" noProof="0">
+              <a:ln>
+                <a:noFill/>
+              </a:ln>
+              <a:solidFill>
+                <a:srgbClr val="FFFFFF"/>
+              </a:solidFill>
+              <a:effectLst/>
+              <a:uLnTx/>
+              <a:uFillTx/>
+              <a:latin typeface="Open Sans Light"/>
+              <a:ea typeface="Open Sans"/>
+              <a:cs typeface="Calibri"/>
+              <a:sym typeface="Open Sans"/>
+            </a:endParaRPr>
+          </a:p>
+        </p:txBody>
+      </p:sp>
+      <p:sp>
+        <p:nvSpPr>
+          <p:cNvPr id="5" name="Подзаголовок 2"/>
+          <p:cNvSpPr txBox="1">
+            <a:spLocks/>
+          </p:cNvSpPr>
+          <p:nvPr/>
+        </p:nvSpPr>
+        <p:spPr bwMode="auto">
+          <a:xfrm>
+            <a:off x="2055993" y="2753858"/>
+            <a:ext cx="6408712" cy="681807"/>
+          </a:xfrm>
+          <a:prstGeom prst="rect">
+            <a:avLst/>
+          </a:prstGeom>
+          <a:ln w="25400">
+            <a:miter lim="400000"/>
+          </a:ln>
+        </p:spPr>
+        <p:txBody>
+          <a:bodyPr tIns="91439" bIns="91439" anchor="ctr">
+            <a:normAutofit/>
+          </a:bodyPr>
+          <a:lstStyle>
+            <a:lvl1pPr marL="0" marR="0" indent="0" algn="r" defTabSz="1828800">
+              <a:lnSpc>
+                <a:spcPct val="110000"/>
+              </a:lnSpc>
+              <a:spcBef>
+                <a:spcPts val="0"/>
+              </a:spcBef>
+              <a:spcAft>
+                <a:spcPts val="0"/>
+              </a:spcAft>
+              <a:buClrTx/>
+              <a:buSzTx/>
+              <a:buFontTx/>
+              <a:buNone/>
+              <a:defRPr sz="2800" b="0" i="0" u="none" strike="noStrike" cap="none" spc="0">
+                <a:solidFill>
+                  <a:srgbClr val="535353"/>
+                </a:solidFill>
+                <a:latin typeface="Open Sans"/>
+                <a:ea typeface="Open Sans"/>
+                <a:cs typeface="Open Sans"/>
+              </a:defRPr>
+            </a:lvl1pPr>
+            <a:lvl2pPr marL="0" marR="0" indent="457200" algn="l" defTabSz="1828800">
+              <a:lnSpc>
+                <a:spcPct val="110000"/>
+              </a:lnSpc>
+              <a:spcBef>
+                <a:spcPts val="0"/>
+              </a:spcBef>
+              <a:spcAft>
+                <a:spcPts val="0"/>
+              </a:spcAft>
+              <a:buClrTx/>
+              <a:buSzTx/>
+              <a:buFontTx/>
+              <a:buNone/>
+              <a:defRPr sz="2400" b="0" i="0" u="none" strike="noStrike" cap="none" spc="0">
+                <a:solidFill>
+                  <a:srgbClr val="535353"/>
+                </a:solidFill>
+                <a:latin typeface="Open Sans"/>
+                <a:ea typeface="Open Sans"/>
+                <a:cs typeface="Open Sans"/>
+              </a:defRPr>
+            </a:lvl2pPr>
+            <a:lvl3pPr marL="0" marR="0" indent="914400" algn="l" defTabSz="1828800">
+              <a:lnSpc>
+                <a:spcPct val="110000"/>
+              </a:lnSpc>
+              <a:spcBef>
+                <a:spcPts val="0"/>
+              </a:spcBef>
+              <a:spcAft>
+                <a:spcPts val="0"/>
+              </a:spcAft>
+              <a:buClrTx/>
+              <a:buSzTx/>
+              <a:buFontTx/>
+              <a:buNone/>
+              <a:defRPr sz="2400" b="0" i="0" u="none" strike="noStrike" cap="none" spc="0">
+                <a:solidFill>
+                  <a:srgbClr val="535353"/>
+                </a:solidFill>
+                <a:latin typeface="Open Sans"/>
+                <a:ea typeface="Open Sans"/>
+                <a:cs typeface="Open Sans"/>
+              </a:defRPr>
+            </a:lvl3pPr>
+            <a:lvl4pPr marL="0" marR="0" indent="1371600" algn="l" defTabSz="1828800">
+              <a:lnSpc>
+                <a:spcPct val="110000"/>
+              </a:lnSpc>
+              <a:spcBef>
+                <a:spcPts val="0"/>
+              </a:spcBef>
+              <a:spcAft>
+                <a:spcPts val="0"/>
+              </a:spcAft>
+              <a:buClrTx/>
+              <a:buSzTx/>
+              <a:buFontTx/>
+              <a:buNone/>
+              <a:defRPr sz="2400" b="0" i="0" u="none" strike="noStrike" cap="none" spc="0">
+                <a:solidFill>
+                  <a:srgbClr val="535353"/>
+                </a:solidFill>
+                <a:latin typeface="Open Sans"/>
+                <a:ea typeface="Open Sans"/>
+                <a:cs typeface="Open Sans"/>
+              </a:defRPr>
+            </a:lvl4pPr>
+            <a:lvl5pPr marL="0" marR="0" indent="1828800" algn="l" defTabSz="1828800">
+              <a:lnSpc>
+                <a:spcPct val="110000"/>
+              </a:lnSpc>
+              <a:spcBef>
+                <a:spcPts val="0"/>
+              </a:spcBef>
+              <a:spcAft>
+                <a:spcPts val="0"/>
+              </a:spcAft>
+              <a:buClrTx/>
+              <a:buSzTx/>
+              <a:buFontTx/>
+              <a:buNone/>
+              <a:defRPr sz="2400" b="0" i="0" u="none" strike="noStrike" cap="none" spc="0">
+                <a:solidFill>
+                  <a:srgbClr val="535353"/>
+                </a:solidFill>
+                <a:latin typeface="Open Sans"/>
+                <a:ea typeface="Open Sans"/>
+                <a:cs typeface="Open Sans"/>
+              </a:defRPr>
+            </a:lvl5pPr>
+            <a:lvl6pPr marL="0" marR="0" indent="2286000" algn="l" defTabSz="1828800">
+              <a:lnSpc>
+                <a:spcPct val="110000"/>
+              </a:lnSpc>
+              <a:spcBef>
+                <a:spcPts val="0"/>
+              </a:spcBef>
+              <a:spcAft>
+                <a:spcPts val="0"/>
+              </a:spcAft>
+              <a:buClrTx/>
+              <a:buSzTx/>
+              <a:buFontTx/>
+              <a:buNone/>
+              <a:defRPr sz="2400" b="0" i="0" u="none" strike="noStrike" cap="none" spc="0">
+                <a:solidFill>
+                  <a:srgbClr val="0082B9"/>
+                </a:solidFill>
+                <a:latin typeface="Open Sans"/>
+                <a:ea typeface="Open Sans"/>
+                <a:cs typeface="Open Sans"/>
+              </a:defRPr>
+            </a:lvl6pPr>
+            <a:lvl7pPr marL="0" marR="0" indent="2743200" algn="l" defTabSz="1828800">
+              <a:lnSpc>
+                <a:spcPct val="110000"/>
+              </a:lnSpc>
+              <a:spcBef>
+                <a:spcPts val="0"/>
+              </a:spcBef>
+              <a:spcAft>
+                <a:spcPts val="0"/>
+              </a:spcAft>
+              <a:buClrTx/>
+              <a:buSzTx/>
+              <a:buFontTx/>
+              <a:buNone/>
+              <a:defRPr sz="2400" b="0" i="0" u="none" strike="noStrike" cap="none" spc="0">
+                <a:solidFill>
+                  <a:srgbClr val="0082B9"/>
+                </a:solidFill>
+                <a:latin typeface="Open Sans"/>
+                <a:ea typeface="Open Sans"/>
+                <a:cs typeface="Open Sans"/>
+              </a:defRPr>
+            </a:lvl7pPr>
+            <a:lvl8pPr marL="0" marR="0" indent="3200400" algn="l" defTabSz="1828800">
+              <a:lnSpc>
+                <a:spcPct val="110000"/>
+              </a:lnSpc>
+              <a:spcBef>
+                <a:spcPts val="0"/>
+              </a:spcBef>
+              <a:spcAft>
+                <a:spcPts val="0"/>
+              </a:spcAft>
+              <a:buClrTx/>
+              <a:buSzTx/>
+              <a:buFontTx/>
+              <a:buNone/>
+              <a:defRPr sz="2400" b="0" i="0" u="none" strike="noStrike" cap="none" spc="0">
+                <a:solidFill>
+                  <a:srgbClr val="0082B9"/>
+                </a:solidFill>
+                <a:latin typeface="Open Sans"/>
+                <a:ea typeface="Open Sans"/>
+                <a:cs typeface="Open Sans"/>
+              </a:defRPr>
+            </a:lvl8pPr>
+            <a:lvl9pPr marL="0" marR="0" indent="3657600" algn="l" defTabSz="1828800">
+              <a:lnSpc>
+                <a:spcPct val="110000"/>
+              </a:lnSpc>
+              <a:spcBef>
+                <a:spcPts val="0"/>
+              </a:spcBef>
+              <a:spcAft>
+                <a:spcPts val="0"/>
+              </a:spcAft>
+              <a:buClrTx/>
+              <a:buSzTx/>
+              <a:buFontTx/>
+              <a:buNone/>
+              <a:defRPr sz="2400" b="0" i="0" u="none" strike="noStrike" cap="none" spc="0">
+                <a:solidFill>
+                  <a:srgbClr val="0082B9"/>
+                </a:solidFill>
+                <a:latin typeface="Open Sans"/>
+                <a:ea typeface="Open Sans"/>
+                <a:cs typeface="Open Sans"/>
+              </a:defRPr>
+            </a:lvl9pPr>
+          </a:lstStyle>
+          <a:p>
+            <a:pPr marL="0" marR="0" lvl="0" indent="0" algn="r" defTabSz="1828800" eaLnBrk="1" fontAlgn="auto" latinLnBrk="0" hangingPunct="1">
+              <a:lnSpc>
+                <a:spcPct val="110000"/>
+              </a:lnSpc>
+              <a:spcBef>
+                <a:spcPts val="0"/>
+              </a:spcBef>
+              <a:spcAft>
+                <a:spcPts val="0"/>
+              </a:spcAft>
+              <a:buClrTx/>
+              <a:buSzTx/>
+              <a:buFontTx/>
+              <a:buNone/>
+              <a:tabLst/>
+              <a:defRPr/>
+            </a:pPr>
+            <a:r>
+              <a:rPr kumimoji="0" lang="ru-RU" sz="2800" b="0" i="0" u="none" strike="noStrike" kern="0" cap="none" spc="0" normalizeH="0" baseline="0" noProof="0">
+                <a:ln>
+                  <a:noFill/>
+                </a:ln>
+                <a:solidFill>
+                  <a:srgbClr val="535353"/>
+                </a:solidFill>
+                <a:effectLst/>
+                <a:uLnTx/>
+                <a:uFillTx/>
+                <a:latin typeface="Open Sans"/>
+                <a:ea typeface="Open Sans"/>
+                <a:cs typeface="Open Sans"/>
+              </a:rPr>
+              <a:t>Тема 1 · п. 6  Вызов СМП и специальных служб</a:t>
+            </a:r>
+            <a:endParaRPr kumimoji="0" lang="ru-RU" sz="2800" b="0" i="0" u="none" strike="noStrike" kern="0" cap="none" spc="0" normalizeH="0" baseline="0" noProof="0" dirty="0">
+              <a:ln>
+                <a:noFill/>
+              </a:ln>
+              <a:solidFill>
+                <a:srgbClr val="535353"/>
+              </a:solidFill>
+              <a:effectLst/>
+              <a:uLnTx/>
+              <a:uFillTx/>
+              <a:latin typeface="Open Sans"/>
+              <a:ea typeface="Open Sans"/>
+              <a:cs typeface="Open Sans"/>
+            </a:endParaRPr>
+          </a:p>
+        </p:txBody>
+      </p:sp>
       <p:pic>
         <p:nvPicPr>
           <p:cNvPr id="16" name="Рисунок 15"/>
@@ -66206,7 +66354,9 @@
               <a:defRPr/>
             </a:pPr>
             <a:r>
-              <a:rPr lang="ru-RU" sz="2800"/>
+              <a:rPr lang="ru-RU" sz="2800">
+                <a:solidFill/>
+              </a:rPr>
               <a:t>При вызове скорой медицинской помощи необходимо обязательно сообщить диспетчеру следующую информацию: </a:t>
             </a:r>
             <a:endParaRPr/>
@@ -66227,7 +66377,9 @@
               <a:defRPr/>
             </a:pPr>
             <a:r>
-              <a:rPr lang="ru-RU" sz="2800"/>
+              <a:rPr lang="ru-RU" sz="2800">
+                <a:solidFill/>
+              </a:rPr>
               <a:t>место происшествия, что произошло; </a:t>
             </a:r>
             <a:endParaRPr/>
@@ -66242,7 +66394,9 @@
               <a:defRPr/>
             </a:pPr>
             <a:r>
-              <a:rPr lang="ru-RU" sz="2800"/>
+              <a:rPr lang="ru-RU" sz="2800">
+                <a:solidFill/>
+              </a:rPr>
               <a:t>число пострадавших и тяжесть их состояния; </a:t>
             </a:r>
             <a:endParaRPr/>
@@ -66257,7 +66411,9 @@
               <a:defRPr/>
             </a:pPr>
             <a:r>
-              <a:rPr lang="ru-RU" sz="2800"/>
+              <a:rPr lang="ru-RU" sz="2800">
+                <a:solidFill/>
+              </a:rPr>
               <a:t>какая помощь оказывается.</a:t>
             </a:r>
             <a:endParaRPr/>

--- a/first_aid_tema1_numbered/6_Основные_правила_вызова_скорой_медицинской_помощи.pptx
+++ b/first_aid_tema1_numbered/6_Основные_правила_вызова_скорой_медицинской_помощи.pptx
@@ -65161,9 +65161,6 @@
               <a:t/>
             </a:fld>
             <a:r>
-              <a:rPr>
-                <a:solidFill/>
-              </a:rPr>
               <a:t>2</a:t>
             </a:r>
             <a:endParaRPr kumimoji="0" sz="3500" b="0" i="0" u="none" strike="noStrike" kern="0" cap="none" spc="0" normalizeH="0" baseline="0" noProof="0">
@@ -65610,6 +65607,28 @@
           </a:p>
         </p:txBody>
       </p:sp>
+      <p:pic>
+        <p:nvPicPr>
+          <p:cNvPr id="16" name="Рисунок 15"/>
+          <p:cNvPicPr>
+            <a:picLocks noChangeAspect="1"/>
+          </p:cNvPicPr>
+          <p:nvPr/>
+        </p:nvPicPr>
+        <p:blipFill>
+          <a:blip r:embed="rId2"/>
+          <a:stretch/>
+        </p:blipFill>
+        <p:spPr bwMode="auto">
+          <a:xfrm>
+            <a:off x="1255138" y="4306967"/>
+            <a:ext cx="9772145" cy="8358000"/>
+          </a:xfrm>
+          <a:prstGeom prst="rect">
+            <a:avLst/>
+          </a:prstGeom>
+        </p:spPr>
+      </p:pic>
       <p:sp>
         <p:nvSpPr>
           <p:cNvPr id="17" name="Прямоугольник 16"/>
@@ -65618,8 +65637,8 @@
         </p:nvSpPr>
         <p:spPr bwMode="auto">
           <a:xfrm>
-            <a:off x="2061252" y="3600000"/>
-            <a:ext cx="20000000" cy="9000000"/>
+            <a:off x="11975976" y="5993904"/>
+            <a:ext cx="11926682" cy="3372975"/>
           </a:xfrm>
           <a:prstGeom prst="rect">
             <a:avLst/>
@@ -65635,7 +65654,7 @@
               <a:defRPr/>
             </a:pPr>
             <a:r>
-              <a:rPr lang="ru-RU" sz="2800">
+              <a:rPr lang="ru-RU" sz="2200">
                 <a:solidFill>
                   <a:srgbClr val="404040"/>
                 </a:solidFill>
@@ -65650,13 +65669,13 @@
               <a:defRPr/>
             </a:pPr>
             <a:r>
-              <a:rPr lang="ru-RU" sz="2800">
+              <a:rPr lang="ru-RU" sz="2200">
                 <a:solidFill>
                   <a:srgbClr val="404040"/>
                 </a:solidFill>
                 <a:latin typeface="Open Sans"/>
               </a:rPr>
-              <a:t> </a:t>
+              <a:t xml:space="preserve"> </a:t>
             </a:r>
             <a:endParaRPr/>
           </a:p>
@@ -65665,13 +65684,13 @@
               <a:defRPr/>
             </a:pPr>
             <a:r>
-              <a:rPr lang="ru-RU" sz="2800">
+              <a:rPr lang="ru-RU" sz="2200">
                 <a:solidFill>
                   <a:srgbClr val="404040"/>
                 </a:solidFill>
                 <a:latin typeface="Open Sans"/>
               </a:rPr>
-              <a:t>Поводы к вызову скорой медицинской помощи (не все входят в перечень состояний первой помощи, но требуют вызова СМП): нарушения сознания, дыхания, кровообращения; психические расстройства с опасностью для себя/окружающих; болевой синдром; травмы, отравления, ранения; термические и химические ожоги; кровотечения; роды, угроза прерывания беременности.</a:t>
+              <a:t>Поводы к вызову скорой медицинской помощи: нарушения сознания, дыхания, кровообращения; психические расстройства с опасностью для себя/окружающих; болевой синдром; травмы, отравления, ранения; термические и химические ожоги; кровотечения; роды, угроза прерывания беременности.</a:t>
             </a:r>
             <a:endParaRPr/>
           </a:p>
@@ -65680,13 +65699,13 @@
               <a:defRPr/>
             </a:pPr>
             <a:r>
-              <a:rPr lang="ru-RU" sz="2800">
+              <a:rPr lang="ru-RU" sz="2200">
                 <a:solidFill>
                   <a:srgbClr val="404040"/>
                 </a:solidFill>
                 <a:latin typeface="Open Sans"/>
               </a:rPr>
-              <a:t> </a:t>
+              <a:t xml:space="preserve"> </a:t>
             </a:r>
             <a:endParaRPr/>
           </a:p>
@@ -65695,28 +65714,13 @@
               <a:defRPr/>
             </a:pPr>
             <a:r>
-              <a:rPr lang="ru-RU" sz="2800">
+              <a:rPr lang="ru-RU" sz="2200">
                 <a:solidFill>
                   <a:srgbClr val="404040"/>
                 </a:solidFill>
                 <a:latin typeface="Open Sans"/>
               </a:rPr>
-              <a:t>Сообщить диспетчеру: место и суть происшествия; число пострадавших, повреждения, тяжесть; какая помощь оказывается.</a:t>
-            </a:r>
-            <a:endParaRPr/>
-          </a:p>
-          <a:p>
-            <a:pPr>
-              <a:defRPr/>
-            </a:pPr>
-            <a:r>
-              <a:rPr lang="ru-RU" sz="2800">
-                <a:solidFill>
-                  <a:srgbClr val="404040"/>
-                </a:solidFill>
-                <a:latin typeface="Open Sans"/>
-              </a:rPr>
-              <a:t>Трубку отключать после сообщения диспетчера о том, что вызов принят.</a:t>
+              <a:t>Сообщить диспетчеру: место и суть происшествия; число пострадавших, повреждения, тяжесть; какая помощь оказывается. Трубку отключать после сообщения диспетчера о том, что вызов принят.</a:t>
             </a:r>
             <a:endParaRPr/>
           </a:p>
@@ -65858,9 +65862,6 @@
               <a:t/>
             </a:fld>
             <a:r>
-              <a:rPr>
-                <a:solidFill/>
-              </a:rPr>
               <a:t>3</a:t>
             </a:r>
             <a:endParaRPr kumimoji="0" sz="3500" b="0" i="0" u="none" strike="noStrike" kern="0" cap="none" spc="0" normalizeH="0" baseline="0" noProof="0">
@@ -66288,7 +66289,7 @@
                 <a:ea typeface="Open Sans"/>
                 <a:cs typeface="Open Sans"/>
               </a:rPr>
-              <a:t>Тема 1 · п. 6  Вызов СМП и специальных служб</a:t>
+              <a:t>Аспекты оказания первой помощи</a:t>
             </a:r>
             <a:endParaRPr kumimoji="0" lang="ru-RU" sz="2800" b="0" i="0" u="none" strike="noStrike" kern="0" cap="none" spc="0" normalizeH="0" baseline="0" noProof="0" dirty="0">
               <a:ln>
@@ -66354,9 +66355,7 @@
               <a:defRPr/>
             </a:pPr>
             <a:r>
-              <a:rPr lang="ru-RU" sz="2800">
-                <a:solidFill/>
-              </a:rPr>
+              <a:rPr lang="ru-RU" sz="2800"/>
               <a:t>При вызове скорой медицинской помощи необходимо обязательно сообщить диспетчеру следующую информацию: </a:t>
             </a:r>
             <a:endParaRPr/>
@@ -66377,9 +66376,7 @@
               <a:defRPr/>
             </a:pPr>
             <a:r>
-              <a:rPr lang="ru-RU" sz="2800">
-                <a:solidFill/>
-              </a:rPr>
+              <a:rPr lang="ru-RU" sz="2800"/>
               <a:t>место происшествия, что произошло; </a:t>
             </a:r>
             <a:endParaRPr/>
@@ -66394,9 +66391,7 @@
               <a:defRPr/>
             </a:pPr>
             <a:r>
-              <a:rPr lang="ru-RU" sz="2800">
-                <a:solidFill/>
-              </a:rPr>
+              <a:rPr lang="ru-RU" sz="2800"/>
               <a:t>число пострадавших и тяжесть их состояния; </a:t>
             </a:r>
             <a:endParaRPr/>
@@ -66411,9 +66406,7 @@
               <a:defRPr/>
             </a:pPr>
             <a:r>
-              <a:rPr lang="ru-RU" sz="2800">
-                <a:solidFill/>
-              </a:rPr>
+              <a:rPr lang="ru-RU" sz="2800"/>
               <a:t>какая помощь оказывается.</a:t>
             </a:r>
             <a:endParaRPr/>
